--- a/耶穌耶穌(崇拜版).pptx
+++ b/耶穌耶穌(崇拜版).pptx
@@ -299,7 +299,7 @@
           <a:p>
             <a:fld id="{85A0D2D1-EA6F-422F-8B05-64A315FC21BB}" type="datetimeFigureOut">
               <a:rPr lang="vi-VN" smtClean="0"/>
-              <a:t>09/03/2024</a:t>
+              <a:t>31/08/2024</a:t>
             </a:fld>
             <a:endParaRPr lang="vi-VN"/>
           </a:p>
@@ -469,7 +469,7 @@
           <a:p>
             <a:fld id="{85A0D2D1-EA6F-422F-8B05-64A315FC21BB}" type="datetimeFigureOut">
               <a:rPr lang="vi-VN" smtClean="0"/>
-              <a:t>09/03/2024</a:t>
+              <a:t>31/08/2024</a:t>
             </a:fld>
             <a:endParaRPr lang="vi-VN"/>
           </a:p>
@@ -649,7 +649,7 @@
           <a:p>
             <a:fld id="{85A0D2D1-EA6F-422F-8B05-64A315FC21BB}" type="datetimeFigureOut">
               <a:rPr lang="vi-VN" smtClean="0"/>
-              <a:t>09/03/2024</a:t>
+              <a:t>31/08/2024</a:t>
             </a:fld>
             <a:endParaRPr lang="vi-VN"/>
           </a:p>
@@ -819,7 +819,7 @@
           <a:p>
             <a:fld id="{85A0D2D1-EA6F-422F-8B05-64A315FC21BB}" type="datetimeFigureOut">
               <a:rPr lang="vi-VN" smtClean="0"/>
-              <a:t>09/03/2024</a:t>
+              <a:t>31/08/2024</a:t>
             </a:fld>
             <a:endParaRPr lang="vi-VN"/>
           </a:p>
@@ -1065,7 +1065,7 @@
           <a:p>
             <a:fld id="{85A0D2D1-EA6F-422F-8B05-64A315FC21BB}" type="datetimeFigureOut">
               <a:rPr lang="vi-VN" smtClean="0"/>
-              <a:t>09/03/2024</a:t>
+              <a:t>31/08/2024</a:t>
             </a:fld>
             <a:endParaRPr lang="vi-VN"/>
           </a:p>
@@ -1353,7 +1353,7 @@
           <a:p>
             <a:fld id="{85A0D2D1-EA6F-422F-8B05-64A315FC21BB}" type="datetimeFigureOut">
               <a:rPr lang="vi-VN" smtClean="0"/>
-              <a:t>09/03/2024</a:t>
+              <a:t>31/08/2024</a:t>
             </a:fld>
             <a:endParaRPr lang="vi-VN"/>
           </a:p>
@@ -1775,7 +1775,7 @@
           <a:p>
             <a:fld id="{85A0D2D1-EA6F-422F-8B05-64A315FC21BB}" type="datetimeFigureOut">
               <a:rPr lang="vi-VN" smtClean="0"/>
-              <a:t>09/03/2024</a:t>
+              <a:t>31/08/2024</a:t>
             </a:fld>
             <a:endParaRPr lang="vi-VN"/>
           </a:p>
@@ -1893,7 +1893,7 @@
           <a:p>
             <a:fld id="{85A0D2D1-EA6F-422F-8B05-64A315FC21BB}" type="datetimeFigureOut">
               <a:rPr lang="vi-VN" smtClean="0"/>
-              <a:t>09/03/2024</a:t>
+              <a:t>31/08/2024</a:t>
             </a:fld>
             <a:endParaRPr lang="vi-VN"/>
           </a:p>
@@ -1988,7 +1988,7 @@
           <a:p>
             <a:fld id="{85A0D2D1-EA6F-422F-8B05-64A315FC21BB}" type="datetimeFigureOut">
               <a:rPr lang="vi-VN" smtClean="0"/>
-              <a:t>09/03/2024</a:t>
+              <a:t>31/08/2024</a:t>
             </a:fld>
             <a:endParaRPr lang="vi-VN"/>
           </a:p>
@@ -2265,7 +2265,7 @@
           <a:p>
             <a:fld id="{85A0D2D1-EA6F-422F-8B05-64A315FC21BB}" type="datetimeFigureOut">
               <a:rPr lang="vi-VN" smtClean="0"/>
-              <a:t>09/03/2024</a:t>
+              <a:t>31/08/2024</a:t>
             </a:fld>
             <a:endParaRPr lang="vi-VN"/>
           </a:p>
@@ -2522,7 +2522,7 @@
           <a:p>
             <a:fld id="{85A0D2D1-EA6F-422F-8B05-64A315FC21BB}" type="datetimeFigureOut">
               <a:rPr lang="vi-VN" smtClean="0"/>
-              <a:t>09/03/2024</a:t>
+              <a:t>31/08/2024</a:t>
             </a:fld>
             <a:endParaRPr lang="vi-VN"/>
           </a:p>
@@ -2738,7 +2738,7 @@
           <a:p>
             <a:fld id="{85A0D2D1-EA6F-422F-8B05-64A315FC21BB}" type="datetimeFigureOut">
               <a:rPr lang="vi-VN" smtClean="0"/>
-              <a:t>09/03/2024</a:t>
+              <a:t>31/08/2024</a:t>
             </a:fld>
             <a:endParaRPr lang="vi-VN"/>
           </a:p>
@@ -3125,7 +3125,7 @@
         </p:nvSpPr>
         <p:spPr>
           <a:xfrm>
-            <a:off x="0" y="2857513"/>
+            <a:off x="0" y="2628913"/>
             <a:ext cx="12192000" cy="1143000"/>
           </a:xfrm>
         </p:spPr>
